--- a/Lunes-08/S01_Lunes-08_1_Carrusel_Asi-es-Notaly_9x16.pptx
+++ b/Lunes-08/S01_Lunes-08_1_Carrusel_Asi-es-Notaly_9x16.pptx
@@ -3809,7 +3809,7 @@
         <p:spPr>
           <a:xfrm>
             <a:off x="777240" y="10191369"/>
-            <a:ext cx="6675120" cy="1530858"/>
+            <a:ext cx="6675120" cy="1118108"/>
           </a:xfrm>
           <a:prstGeom prst="rect">
             <a:avLst/>
@@ -3834,7 +3834,7 @@
                 </a:solidFill>
                 <a:latin typeface="Inter"/>
               </a:rPr>
-              <a:t>Notaly ya está abierto en early access.</a:t>
+              <a:t>Esto es Notaly.</a:t>
             </a:r>
           </a:p>
         </p:txBody>
@@ -4069,7 +4069,7 @@
                 </a:solidFill>
                 <a:latin typeface="Inter"/>
               </a:rPr>
-              <a:t>Pruébalo ya: notaly.com.ve</a:t>
+              <a:t>Conócenos en notaly.com.ve</a:t>
             </a:r>
           </a:p>
         </p:txBody>
